--- a/content/Lectures/Semester 1/Week 05 - Mixed Integer Programming/5 Source Files/Week 5 - Mixed Integer Programming.pptx
+++ b/content/Lectures/Semester 1/Week 05 - Mixed Integer Programming/5 Source Files/Week 5 - Mixed Integer Programming.pptx
@@ -5479,7 +5479,7 @@
                           <a:pPr algn="ctr"/>
                           <a:r>
                             <a:rPr lang="en-GB" dirty="0"/>
-                            <a:t>Weight (Kg) - </a:t>
+                            <a:t>Weight (kg) - </a:t>
                           </a:r>
                           <a14:m>
                             <m:oMath xmlns:m="http://schemas.openxmlformats.org/officeDocument/2006/math">
@@ -7167,7 +7167,7 @@
                             <a:rPr lang="en-GB" b="0" i="1" smtClean="0">
                               <a:latin typeface="Cambria Math" panose="02040503050406030204" pitchFamily="18" charset="0"/>
                             </a:rPr>
-                            <m:t>6</m:t>
+                            <m:t>7</m:t>
                           </m:r>
                         </m:sup>
                         <m:e>
@@ -7270,7 +7270,7 @@
                             <a:rPr lang="en-GB" b="0" i="1" smtClean="0">
                               <a:latin typeface="Cambria Math" panose="02040503050406030204" pitchFamily="18" charset="0"/>
                             </a:rPr>
-                            <m:t>6</m:t>
+                            <m:t>7</m:t>
                           </m:r>
                         </m:sup>
                         <m:e>
@@ -7566,7 +7566,7 @@
                           <a:pPr algn="ctr"/>
                           <a:r>
                             <a:rPr lang="en-GB" sz="1400" dirty="0"/>
-                            <a:t>Weight (Kg) - </a:t>
+                            <a:t>Weight (kg) - </a:t>
                           </a:r>
                           <a14:m>
                             <m:oMath xmlns:m="http://schemas.openxmlformats.org/officeDocument/2006/math">
@@ -8616,7 +8616,7 @@
           <a:p>
             <a:r>
               <a:rPr lang="en-US" sz="2400" dirty="0"/>
-              <a:t>The region wants to build the minimum number of fire stations and ensure that at least one fire station is near 15 minutes of each city.</a:t>
+              <a:t>The region wants to build the minimum number of fire stations and ensure that at least one fire station is within 15 minutes of each city.</a:t>
             </a:r>
           </a:p>
           <a:p>
@@ -9231,7 +9231,7 @@
                     <a:p>
                       <a:r>
                         <a:rPr lang="en-GB" dirty="0"/>
-                        <a:t>20</a:t>
+                        <a:t>30</a:t>
                       </a:r>
                     </a:p>
                   </a:txBody>
@@ -10138,7 +10138,7 @@
                     <a:p>
                       <a:r>
                         <a:rPr lang="en-GB" dirty="0"/>
-                        <a:t>20</a:t>
+                        <a:t>30</a:t>
                       </a:r>
                     </a:p>
                   </a:txBody>
@@ -11526,7 +11526,7 @@
                       <a:pPr algn="ctr"/>
                       <a:r>
                         <a:rPr lang="en-GB" sz="1400" dirty="0"/>
-                        <a:t>20</a:t>
+                        <a:t>30</a:t>
                       </a:r>
                     </a:p>
                   </a:txBody>
@@ -12042,6 +12042,12 @@
                               <a:latin typeface="Cambria Math" panose="02040503050406030204" pitchFamily="18" charset="0"/>
                             </a:rPr>
                             <m:t>𝑖</m:t>
+                          </m:r>
+                          <m:r>
+                            <a:rPr lang="en-GB" sz="2400" b="0" i="1" smtClean="0">
+                              <a:latin typeface="Cambria Math" panose="02040503050406030204" pitchFamily="18" charset="0"/>
+                            </a:rPr>
+                            <m:t>=1</m:t>
                           </m:r>
                         </m:sub>
                         <m:sup>
@@ -13303,7 +13309,7 @@
                       <a:pPr algn="ctr"/>
                       <a:r>
                         <a:rPr lang="en-GB" sz="1400" dirty="0"/>
-                        <a:t>20</a:t>
+                        <a:t>30</a:t>
                       </a:r>
                     </a:p>
                   </a:txBody>
@@ -14905,7 +14911,7 @@
                       <a:pPr algn="ctr"/>
                       <a:r>
                         <a:rPr lang="en-GB" sz="1400" dirty="0"/>
-                        <a:t>20</a:t>
+                        <a:t>30</a:t>
                       </a:r>
                     </a:p>
                   </a:txBody>
@@ -15159,6 +15165,12 @@
                               <a:latin typeface="Cambria Math" panose="02040503050406030204" pitchFamily="18" charset="0"/>
                             </a:rPr>
                             <m:t>𝑖</m:t>
+                          </m:r>
+                          <m:r>
+                            <a:rPr lang="en-GB" sz="2400" i="1">
+                              <a:latin typeface="Cambria Math" panose="02040503050406030204" pitchFamily="18" charset="0"/>
+                            </a:rPr>
+                            <m:t>=1</m:t>
                           </m:r>
                         </m:sub>
                         <m:sup>
@@ -18131,6 +18143,12 @@
                               <a:latin typeface="Cambria Math" panose="02040503050406030204" pitchFamily="18" charset="0"/>
                             </a:rPr>
                             <m:t>𝑖</m:t>
+                          </m:r>
+                          <m:r>
+                            <a:rPr lang="en-GB" sz="1800" i="1">
+                              <a:latin typeface="Cambria Math" panose="02040503050406030204" pitchFamily="18" charset="0"/>
+                            </a:rPr>
+                            <m:t>=1</m:t>
                           </m:r>
                         </m:sub>
                         <m:sup>
@@ -22064,7 +22082,7 @@
               <a:p>
                 <a:r>
                   <a:rPr lang="en-GB" dirty="0"/>
-                  <a:t>Minimum order placed must be greater than 6</a:t>
+                  <a:t>Minimum order placed must be at least 6</a:t>
                 </a:r>
               </a:p>
               <a:p>
@@ -23067,7 +23085,7 @@
                     <a:p>
                       <a:r>
                         <a:rPr lang="en-GB" dirty="0"/>
-                        <a:t>Cost (kg)</a:t>
+                        <a:t>Cost (per kg)</a:t>
                       </a:r>
                     </a:p>
                   </a:txBody>
@@ -23080,7 +23098,7 @@
                     <a:p>
                       <a:r>
                         <a:rPr lang="en-GB" dirty="0"/>
-                        <a:t>Expected Profit (kg)</a:t>
+                        <a:t>Expected Profit (per kg)</a:t>
                       </a:r>
                     </a:p>
                   </a:txBody>
@@ -23442,7 +23460,7 @@
                 </a14:m>
                 <a:r>
                   <a:rPr lang="en-GB" dirty="0"/>
-                  <a:t> - Profit (per item) for item </a:t>
+                  <a:t> - Profit (per kg) for item </a:t>
                 </a:r>
                 <a14:m>
                   <m:oMath xmlns:m="http://schemas.openxmlformats.org/officeDocument/2006/math">
@@ -23491,7 +23509,7 @@
                 </a14:m>
                 <a:r>
                   <a:rPr lang="en-GB" dirty="0"/>
-                  <a:t> - Cost (per item) for item </a:t>
+                  <a:t> - Cost (per kg) for item </a:t>
                 </a:r>
                 <a14:m>
                   <m:oMath xmlns:m="http://schemas.openxmlformats.org/officeDocument/2006/math">
@@ -23621,7 +23639,7 @@
                 </a:pPr>
                 <a:r>
                   <a:rPr lang="en-GB" dirty="0"/>
-                  <a:t>Minimum order per item is greater than 6</a:t>
+                  <a:t>Minimum order per item is at least 6</a:t>
                 </a:r>
               </a:p>
               <a:p>
@@ -24134,7 +24152,7 @@
                     <a:p>
                       <a:r>
                         <a:rPr lang="en-GB" dirty="0"/>
-                        <a:t>Cost (g)</a:t>
+                        <a:t>Cost (per kg)</a:t>
                       </a:r>
                     </a:p>
                   </a:txBody>
@@ -24147,7 +24165,7 @@
                     <a:p>
                       <a:r>
                         <a:rPr lang="en-GB" dirty="0"/>
-                        <a:t>Expected Profit (g)</a:t>
+                        <a:t>Expected Profit (per kg)</a:t>
                       </a:r>
                     </a:p>
                   </a:txBody>
@@ -25085,7 +25103,7 @@
                 </a:pPr>
                 <a:r>
                   <a:rPr lang="en-GB" dirty="0"/>
-                  <a:t>Minimum order per item is greater than 6</a:t>
+                  <a:t>Minimum order per item is at least 6</a:t>
                 </a:r>
               </a:p>
               <a:p>
@@ -25725,7 +25743,7 @@
                     <a:p>
                       <a:r>
                         <a:rPr lang="en-GB" dirty="0"/>
-                        <a:t>Cost (g)</a:t>
+                        <a:t>Cost (per kg)</a:t>
                       </a:r>
                     </a:p>
                   </a:txBody>
@@ -25738,7 +25756,7 @@
                     <a:p>
                       <a:r>
                         <a:rPr lang="en-GB" dirty="0"/>
-                        <a:t>Expected Profit (g)</a:t>
+                        <a:t>Expected Profit (per kg)</a:t>
                       </a:r>
                     </a:p>
                   </a:txBody>
@@ -26100,7 +26118,7 @@
                 </a14:m>
                 <a:r>
                   <a:rPr lang="en-GB" dirty="0"/>
-                  <a:t> – 0 if item </a:t>
+                  <a:t> – 1 if item </a:t>
                 </a:r>
                 <a14:m>
                   <m:oMath xmlns:m="http://schemas.openxmlformats.org/officeDocument/2006/math">
@@ -26114,7 +26132,7 @@
                 </a14:m>
                 <a:r>
                   <a:rPr lang="en-GB" dirty="0"/>
-                  <a:t> picked, 1 if item </a:t>
+                  <a:t> picked, 0 if item </a:t>
                 </a:r>
                 <a14:m>
                   <m:oMath xmlns:m="http://schemas.openxmlformats.org/officeDocument/2006/math">
@@ -27347,7 +27365,7 @@
                 </a:pPr>
                 <a:r>
                   <a:rPr lang="en-GB" sz="2000" dirty="0"/>
-                  <a:t>Minimum order per item is greater than 6</a:t>
+                  <a:t>Minimum order per item is at least 6</a:t>
                 </a:r>
               </a:p>
               <a:p>
@@ -28021,7 +28039,7 @@
                 </a:pPr>
                 <a:r>
                   <a:rPr lang="en-GB" sz="1600" dirty="0"/>
-                  <a:t>You can order amounts of a most 2 items</a:t>
+                  <a:t>You can order amounts of at most 2 items</a:t>
                 </a:r>
               </a:p>
               <a:p>
@@ -28747,7 +28765,7 @@
                     <a:p>
                       <a:r>
                         <a:rPr lang="en-GB" dirty="0"/>
-                        <a:t>Cost (g)</a:t>
+                        <a:t>Cost (per kg)</a:t>
                       </a:r>
                     </a:p>
                   </a:txBody>
@@ -28760,7 +28778,7 @@
                     <a:p>
                       <a:r>
                         <a:rPr lang="en-GB" dirty="0"/>
-                        <a:t>Expected Profit (g)</a:t>
+                        <a:t>Expected Profit (per kg)</a:t>
                       </a:r>
                     </a:p>
                   </a:txBody>
@@ -29613,7 +29631,7 @@
                 </a:pPr>
                 <a:r>
                   <a:rPr lang="en-GB" sz="1600" dirty="0"/>
-                  <a:t>You can order amounts of a most 2 items</a:t>
+                  <a:t>You can order amounts of at most 2 items</a:t>
                 </a:r>
               </a:p>
               <a:p>
@@ -31077,7 +31095,7 @@
                     <a:p>
                       <a:r>
                         <a:rPr lang="en-GB" dirty="0"/>
-                        <a:t>Cost (g)</a:t>
+                        <a:t>Cost (per kg)</a:t>
                       </a:r>
                     </a:p>
                   </a:txBody>
@@ -31090,7 +31108,7 @@
                     <a:p>
                       <a:r>
                         <a:rPr lang="en-GB" dirty="0"/>
-                        <a:t>Expected Profit (g)</a:t>
+                        <a:t>Expected Profit (per kg)</a:t>
                       </a:r>
                     </a:p>
                   </a:txBody>
@@ -33164,6 +33182,53 @@
                         <m:t>≤12.5</m:t>
                       </m:r>
                     </m:oMath>
+                    <m:oMath xmlns:m="http://schemas.openxmlformats.org/officeDocument/2006/math">
+                      <m:r>
+                        <a:rPr lang="en-GB" i="1">
+                          <a:solidFill>
+                            <a:schemeClr val="tx1"/>
+                          </a:solidFill>
+                          <a:latin typeface="Cambria Math" panose="02040503050406030204" pitchFamily="18" charset="0"/>
+                        </a:rPr>
+                        <m:t>−</m:t>
+                      </m:r>
+                      <m:r>
+                        <a:rPr lang="en-GB" i="1">
+                          <a:solidFill>
+                            <a:schemeClr val="tx1"/>
+                          </a:solidFill>
+                          <a:latin typeface="Cambria Math" panose="02040503050406030204" pitchFamily="18" charset="0"/>
+                        </a:rPr>
+                        <m:t>𝑥</m:t>
+                      </m:r>
+                      <m:r>
+                        <a:rPr lang="en-GB" i="1">
+                          <a:solidFill>
+                            <a:schemeClr val="tx1"/>
+                          </a:solidFill>
+                          <a:latin typeface="Cambria Math" panose="02040503050406030204" pitchFamily="18" charset="0"/>
+                        </a:rPr>
+                        <m:t>+</m:t>
+                      </m:r>
+                      <m:r>
+                        <a:rPr lang="en-GB" i="1">
+                          <a:solidFill>
+                            <a:schemeClr val="tx1"/>
+                          </a:solidFill>
+                          <a:latin typeface="Cambria Math" panose="02040503050406030204" pitchFamily="18" charset="0"/>
+                        </a:rPr>
+                        <m:t>𝑦</m:t>
+                      </m:r>
+                      <m:r>
+                        <a:rPr lang="en-GB" i="1">
+                          <a:solidFill>
+                            <a:schemeClr val="tx1"/>
+                          </a:solidFill>
+                          <a:latin typeface="Cambria Math" panose="02040503050406030204" pitchFamily="18" charset="0"/>
+                        </a:rPr>
+                        <m:t>≤1</m:t>
+                      </m:r>
+                    </m:oMath>
                   </m:oMathPara>
                 </a14:m>
                 <a:br>
@@ -33513,6 +33578,53 @@
                           <a:latin typeface="Cambria Math" panose="02040503050406030204" pitchFamily="18" charset="0"/>
                         </a:rPr>
                         <m:t>≤12.5</m:t>
+                      </m:r>
+                    </m:oMath>
+                    <m:oMath xmlns:m="http://schemas.openxmlformats.org/officeDocument/2006/math">
+                      <m:r>
+                        <a:rPr lang="en-GB" i="1">
+                          <a:solidFill>
+                            <a:schemeClr val="tx1"/>
+                          </a:solidFill>
+                          <a:latin typeface="Cambria Math" panose="02040503050406030204" pitchFamily="18" charset="0"/>
+                        </a:rPr>
+                        <m:t>−</m:t>
+                      </m:r>
+                      <m:r>
+                        <a:rPr lang="en-GB" i="1">
+                          <a:solidFill>
+                            <a:schemeClr val="tx1"/>
+                          </a:solidFill>
+                          <a:latin typeface="Cambria Math" panose="02040503050406030204" pitchFamily="18" charset="0"/>
+                        </a:rPr>
+                        <m:t>𝑥</m:t>
+                      </m:r>
+                      <m:r>
+                        <a:rPr lang="en-GB" i="1">
+                          <a:solidFill>
+                            <a:schemeClr val="tx1"/>
+                          </a:solidFill>
+                          <a:latin typeface="Cambria Math" panose="02040503050406030204" pitchFamily="18" charset="0"/>
+                        </a:rPr>
+                        <m:t>+</m:t>
+                      </m:r>
+                      <m:r>
+                        <a:rPr lang="en-GB" i="1">
+                          <a:solidFill>
+                            <a:schemeClr val="tx1"/>
+                          </a:solidFill>
+                          <a:latin typeface="Cambria Math" panose="02040503050406030204" pitchFamily="18" charset="0"/>
+                        </a:rPr>
+                        <m:t>𝑦</m:t>
+                      </m:r>
+                      <m:r>
+                        <a:rPr lang="en-GB" i="1">
+                          <a:solidFill>
+                            <a:schemeClr val="tx1"/>
+                          </a:solidFill>
+                          <a:latin typeface="Cambria Math" panose="02040503050406030204" pitchFamily="18" charset="0"/>
+                        </a:rPr>
+                        <m:t>≤1</m:t>
                       </m:r>
                     </m:oMath>
                   </m:oMathPara>
@@ -36183,31 +36295,12 @@
                       <m:jc m:val="centerGroup"/>
                     </m:oMathParaPr>
                     <m:oMath xmlns:m="http://schemas.openxmlformats.org/officeDocument/2006/math">
-                      <m:sSup>
-                        <m:sSupPr>
-                          <m:ctrlPr>
-                            <a:rPr lang="en-GB" sz="1600" b="0" i="1" smtClean="0">
-                              <a:latin typeface="Cambria Math" panose="02040503050406030204" pitchFamily="18" charset="0"/>
-                            </a:rPr>
-                          </m:ctrlPr>
-                        </m:sSupPr>
-                        <m:e>
-                          <m:r>
-                            <a:rPr lang="en-GB" sz="1600" b="0" i="1" smtClean="0">
-                              <a:latin typeface="Cambria Math" panose="02040503050406030204" pitchFamily="18" charset="0"/>
-                            </a:rPr>
-                            <m:t>𝑃</m:t>
-                          </m:r>
-                        </m:e>
-                        <m:sup>
-                          <m:r>
-                            <a:rPr lang="en-GB" sz="1600" b="0" i="1" smtClean="0">
-                              <a:latin typeface="Cambria Math" panose="02040503050406030204" pitchFamily="18" charset="0"/>
-                            </a:rPr>
-                            <m:t>∗</m:t>
-                          </m:r>
-                        </m:sup>
-                      </m:sSup>
+                      <m:r>
+                        <a:rPr lang="en-GB" sz="1600" b="0" i="1" smtClean="0">
+                          <a:latin typeface="Cambria Math" panose="02040503050406030204" pitchFamily="18" charset="0"/>
+                        </a:rPr>
+                        <m:t>𝑃</m:t>
+                      </m:r>
                       <m:r>
                         <a:rPr lang="en-GB" sz="1600" b="0" i="1" smtClean="0">
                           <a:latin typeface="Cambria Math" panose="02040503050406030204" pitchFamily="18" charset="0"/>
@@ -36398,31 +36491,12 @@
                       <m:jc m:val="centerGroup"/>
                     </m:oMathParaPr>
                     <m:oMath xmlns:m="http://schemas.openxmlformats.org/officeDocument/2006/math">
-                      <m:sSup>
-                        <m:sSupPr>
-                          <m:ctrlPr>
-                            <a:rPr lang="en-GB" sz="1600" i="1">
-                              <a:latin typeface="Cambria Math" panose="02040503050406030204" pitchFamily="18" charset="0"/>
-                            </a:rPr>
-                          </m:ctrlPr>
-                        </m:sSupPr>
-                        <m:e>
-                          <m:r>
-                            <a:rPr lang="en-GB" sz="1600" i="1">
-                              <a:latin typeface="Cambria Math" panose="02040503050406030204" pitchFamily="18" charset="0"/>
-                            </a:rPr>
-                            <m:t>𝑃</m:t>
-                          </m:r>
-                        </m:e>
-                        <m:sup>
-                          <m:r>
-                            <a:rPr lang="en-GB" sz="1600" i="1">
-                              <a:latin typeface="Cambria Math" panose="02040503050406030204" pitchFamily="18" charset="0"/>
-                            </a:rPr>
-                            <m:t>∗</m:t>
-                          </m:r>
-                        </m:sup>
-                      </m:sSup>
+                      <m:r>
+                        <a:rPr lang="en-GB" sz="1600" i="1">
+                          <a:latin typeface="Cambria Math" panose="02040503050406030204" pitchFamily="18" charset="0"/>
+                        </a:rPr>
+                        <m:t>𝑃</m:t>
+                      </m:r>
                       <m:r>
                         <a:rPr lang="en-GB" sz="1600" i="1">
                           <a:latin typeface="Cambria Math" panose="02040503050406030204" pitchFamily="18" charset="0"/>

--- a/content/Lectures/Semester 1/Week 05 - Mixed Integer Programming/5 Source Files/Week 5 - Mixed Integer Programming.pptx
+++ b/content/Lectures/Semester 1/Week 05 - Mixed Integer Programming/5 Source Files/Week 5 - Mixed Integer Programming.pptx
@@ -22061,7 +22061,7 @@
                 </a14:m>
                 <a:r>
                   <a:rPr lang="en-GB" dirty="0"/>
-                  <a:t> and can order a maximum of 10 per item.</a:t>
+                  <a:t> and can order a maximum of 10 kg per item.</a:t>
                 </a:r>
               </a:p>
               <a:p>
@@ -22082,7 +22082,7 @@
               <a:p>
                 <a:r>
                   <a:rPr lang="en-GB" dirty="0"/>
-                  <a:t>Minimum order placed must be at least 6</a:t>
+                  <a:t>Minimum order placed must be at least 6 kg</a:t>
                 </a:r>
               </a:p>
               <a:p>
@@ -22611,7 +22611,7 @@
                 </a:pPr>
                 <a:r>
                   <a:rPr lang="en-GB" dirty="0"/>
-                  <a:t>Maximum order of 10 per item</a:t>
+                  <a:t>Maximum order of 10 kg per item</a:t>
                 </a:r>
               </a:p>
               <a:p>
@@ -23639,7 +23639,7 @@
                 </a:pPr>
                 <a:r>
                   <a:rPr lang="en-GB" dirty="0"/>
-                  <a:t>Minimum order per item is at least 6</a:t>
+                  <a:t>Minimum order per item is at least 6 kg</a:t>
                 </a:r>
               </a:p>
               <a:p>
@@ -24022,7 +24022,7 @@
                 </a:pPr>
                 <a:r>
                   <a:rPr lang="en-GB" dirty="0"/>
-                  <a:t>This requires at least 6 of every item to be chosen.</a:t>
+                  <a:t>This requires at least 6 kg of every item to be chosen.</a:t>
                 </a:r>
               </a:p>
               <a:p>
@@ -24523,7 +24523,7 @@
             </a:r>
             <a:r>
               <a:rPr lang="en-GB" dirty="0"/>
-              <a:t>I must order at least 6 and no more than 10</a:t>
+              <a:t>I must order at least 6 kg and at most 10 kg</a:t>
             </a:r>
             <a:endParaRPr lang="en-GB" b="1" dirty="0"/>
           </a:p>
@@ -25103,7 +25103,7 @@
                 </a:pPr>
                 <a:r>
                   <a:rPr lang="en-GB" dirty="0"/>
-                  <a:t>Minimum order per item is at least 6</a:t>
+                  <a:t>Minimum order per item is at least 6 kg</a:t>
                 </a:r>
               </a:p>
               <a:p>
@@ -27365,7 +27365,7 @@
                 </a:pPr>
                 <a:r>
                   <a:rPr lang="en-GB" sz="2000" dirty="0"/>
-                  <a:t>Minimum order per item is at least 6</a:t>
+                  <a:t>Minimum order per item is at least 6 kg</a:t>
                 </a:r>
               </a:p>
               <a:p>
@@ -33365,7 +33365,7 @@
             <p:spPr>
               <a:xfrm>
                 <a:off x="1967345" y="3636390"/>
-                <a:ext cx="4128655" cy="2031325"/>
+                <a:ext cx="4128655" cy="2290000"/>
               </a:xfrm>
               <a:prstGeom prst="rect">
                 <a:avLst/>
@@ -33751,7 +33751,7 @@
             <p:spPr>
               <a:xfrm>
                 <a:off x="6834670" y="3636390"/>
-                <a:ext cx="4128655" cy="2031325"/>
+                <a:ext cx="4128655" cy="2290000"/>
               </a:xfrm>
               <a:prstGeom prst="rect">
                 <a:avLst/>
